--- a/submission/05_路演PPT/人生坐标_路演PPT.pptx
+++ b/submission/05_路演PPT/人生坐标_路演PPT.pptx
@@ -3434,7 +3434,7 @@
 </file>
 
 <file path=ppt/slides/slide11.xml><?xml version="1.0" encoding="utf-8"?>
-<p:sld xmlns:a="http://schemas.openxmlformats.org/drawingml/2006/main" xmlns:r="http://schemas.openxmlformats.org/officeDocument/2006/relationships" xmlns:p="http://schemas.openxmlformats.org/presentationml/2006/main">
+<p:sld xmlns:a="http://schemas.openxmlformats.org/drawingml/2006/main" xmlns:p="http://schemas.openxmlformats.org/presentationml/2006/main" xmlns:p14="http://schemas.microsoft.com/office/powerpoint/2010/main">
   <p:cSld>
     <p:bg>
       <p:bgPr>
@@ -4065,6 +4065,101 @@
                   <a:cs typeface="+mn-cs"/>
                 </a:rPr>
                 <a:t>从真实处境出发，找到一个可以验证的下一步。</a:t>
+              </a:r>
+            </a:p>
+          </p:txBody>
+        </p:sp>
+      </p:grpSp>
+      <p:grpSp>
+        <p:nvGrpSpPr>
+          <p:cNvPr id="21" name="team-credit"/>
+          <p:cNvGrpSpPr/>
+          <p:nvPr/>
+        </p:nvGrpSpPr>
+        <p:grpSpPr>
+          <a:xfrm>
+            <a:off x="678942" y="6064568"/>
+            <a:ext cx="2376297" cy="536638"/>
+            <a:chOff x="678942" y="6064568"/>
+            <a:chExt cx="2376297" cy="536638"/>
+          </a:xfrm>
+        </p:grpSpPr>
+        <p:sp>
+          <p:nvSpPr>
+            <p:cNvPr id="22" name="TextBox 6"/>
+            <p:cNvSpPr txBox="1"/>
+            <p:nvPr/>
+          </p:nvSpPr>
+          <p:spPr>
+            <a:xfrm>
+              <a:off x="678942" y="6064568"/>
+              <a:ext cx="2376297" cy="264033"/>
+            </a:xfrm>
+            <a:prstGeom prst="rect">
+              <a:avLst/>
+            </a:prstGeom>
+            <a:noFill/>
+            <a:ln>
+              <a:noFill/>
+            </a:ln>
+          </p:spPr>
+          <p:txBody>
+            <a:bodyPr wrap="none" lIns="0" tIns="0" rIns="0" bIns="0" anchor="t" anchorCtr="0">
+              <a:spAutoFit/>
+            </a:bodyPr>
+            <a:lstStyle/>
+            <a:p>
+              <a:pPr algn="l"/>
+              <a:r>
+                <a:rPr lang="zh-CN" sz="1350" b="1" dirty="0">
+                  <a:solidFill>
+                    <a:srgbClr val="9FB9A5"/>
+                  </a:solidFill>
+                  <a:latin typeface="Arial"/>
+                  <a:ea typeface="Microsoft YaHei"/>
+                  <a:cs typeface="Arial"/>
+                </a:rPr>
+                <a:t>队伍：老登与小登的奇妙之旅</a:t>
+              </a:r>
+            </a:p>
+          </p:txBody>
+        </p:sp>
+        <p:sp>
+          <p:nvSpPr>
+            <p:cNvPr id="23" name="TextBox 7"/>
+            <p:cNvSpPr txBox="1"/>
+            <p:nvPr/>
+          </p:nvSpPr>
+          <p:spPr>
+            <a:xfrm>
+              <a:off x="679704" y="6366510"/>
+              <a:ext cx="2362657" cy="234696"/>
+            </a:xfrm>
+            <a:prstGeom prst="rect">
+              <a:avLst/>
+            </a:prstGeom>
+            <a:noFill/>
+            <a:ln>
+              <a:noFill/>
+            </a:ln>
+          </p:spPr>
+          <p:txBody>
+            <a:bodyPr wrap="none" lIns="0" tIns="0" rIns="0" bIns="0" anchor="t" anchorCtr="0">
+              <a:spAutoFit/>
+            </a:bodyPr>
+            <a:lstStyle/>
+            <a:p>
+              <a:pPr algn="l"/>
+              <a:r>
+                <a:rPr lang="zh-CN" sz="1200" dirty="0">
+                  <a:solidFill>
+                    <a:srgbClr val="D7D4CA"/>
+                  </a:solidFill>
+                  <a:latin typeface="Arial"/>
+                  <a:ea typeface="Microsoft YaHei"/>
+                  <a:cs typeface="Arial"/>
+                </a:rPr>
+                <a:t>队长：房刚毅　·　队员：李喜军</a:t>
               </a:r>
             </a:p>
           </p:txBody>
